--- a/lecons/F5/38_F5_M3_L33_Population_Growth.pptx
+++ b/lecons/F5/38_F5_M3_L33_Population_Growth.pptx
@@ -12935,7 +12935,7 @@
               <a:buNone/>
             </a:pPr>
             <a:r>
-              <a:rPr lang="en-US" sz="4000" b="1" dirty="0">
+              <a:rPr lang="en-US" sz="3200" b="1" dirty="0">
                 <a:solidFill>
                   <a:srgbClr val="111111"/>
                 </a:solidFill>
@@ -12945,7 +12945,7 @@
               </a:rPr>
               <a:t>Topic: The Dynamics of Population and Implications</a:t>
             </a:r>
-            <a:endParaRPr lang="en-US" sz="4000" dirty="0"/>
+            <a:endParaRPr lang="en-US" sz="3200" dirty="0"/>
           </a:p>
           <a:p>
             <a:pPr algn="l" indent="0" marL="0">
@@ -12955,7 +12955,7 @@
               <a:buNone/>
             </a:pPr>
             <a:r>
-              <a:rPr lang="en-US" sz="4000" b="1" dirty="0">
+              <a:rPr lang="en-US" sz="3200" b="1" dirty="0">
                 <a:solidFill>
                   <a:srgbClr val="111111"/>
                 </a:solidFill>
@@ -12965,7 +12965,7 @@
               </a:rPr>
               <a:t>Sub-topic: Population Change in Time (Population Growth)</a:t>
             </a:r>
-            <a:endParaRPr lang="en-US" sz="4000" dirty="0"/>
+            <a:endParaRPr lang="en-US" sz="3200" dirty="0"/>
           </a:p>
           <a:p>
             <a:pPr algn="l" indent="0" marL="0">
@@ -12975,7 +12975,7 @@
               <a:buNone/>
             </a:pPr>
             <a:r>
-              <a:rPr lang="en-US" sz="4000" b="1" dirty="0">
+              <a:rPr lang="en-US" sz="3200" b="1" dirty="0">
                 <a:solidFill>
                   <a:srgbClr val="990011"/>
                 </a:solidFill>
@@ -12985,7 +12985,7 @@
               </a:rPr>
               <a:t>Lesson 33: Population Growth</a:t>
             </a:r>
-            <a:endParaRPr lang="en-US" sz="4000" dirty="0"/>
+            <a:endParaRPr lang="en-US" sz="3200" dirty="0"/>
           </a:p>
         </p:txBody>
       </p:sp>
